--- a/e2e/fixtures/morph-shape-swap.pptx
+++ b/e2e/fixtures/morph-shape-swap.pptx
@@ -544,13 +544,18 @@
   <p:clrMapOvr>
     <a:masterClrMapping/>
   </p:clrMapOvr>
-  <p:transition dur="1000">
-    <p:extLst>
-      <p:ext uri="{C7C9D14B-FE2A-4D35-B620-AB07D5B017F4}">
-        <p159:morph xmlns:p159="http://schemas.microsoft.com/office/powerpoint/2015/09/main"/>
-      </p:ext>
-    </p:extLst>
-  </p:transition>
+  <mc:AlternateContent xmlns:mc="http://schemas.openxmlformats.org/markup-compatibility/2006">
+    <mc:Choice xmlns:p159="http://schemas.microsoft.com/office/powerpoint/2015/09/main" xmlns:p14="http://schemas.microsoft.com/office/powerpoint/2010/main" Requires="p159">
+      <p:transition p14:dur="1000">
+        <p159:morph xmlns:p159="http://schemas.microsoft.com/office/powerpoint/2015/09/main" option="byObject"/>
+      </p:transition>
+    </mc:Choice>
+    <mc:Fallback>
+      <p:transition>
+        <p:fade/>
+      </p:transition>
+    </mc:Fallback>
+  </mc:AlternateContent>
 </p:sld>
 </file>
 

--- a/e2e/fixtures/morph-shape-swap.pptx
+++ b/e2e/fixtures/morph-shape-swap.pptx
@@ -363,7 +363,7 @@
           <a:spcPct val="20000"/>
         </a:spcBef>
         <a:buFont typeface="Arial" panose="020B0604020202020204" pitchFamily="34" charset="0"/>
-        <a:buChar char="&amp;#x2022;"/>
+        <a:buChar char="•"/>
         <a:defRPr sz="3200" kern="1200">
           <a:solidFill>
             <a:schemeClr val="tx1"/>
